--- a/download/PZC_FX_2Var_StressTest_JPY_Property.pptx
+++ b/download/PZC_FX_2Var_StressTest_JPY_Property.pptx
@@ -3247,7 +3247,7 @@
               </a:defRPr>
             </a:pPr>
             <a:r>
-              <a:t>2-Variable Stress Test: FX Rate x Property Value</a:t>
+              <a:t>2-Variable Stress Test: FX Rate x Property Value (10-Year Holding)</a:t>
             </a:r>
           </a:p>
         </p:txBody>
@@ -3341,7 +3341,11 @@
             </a:r>
             <a:br/>
             <a:r>
-              <a:t>期限: 15年 (45→60歲)</a:t>
+              <a:t>按提期限: 15年 (45→60歲)</a:t>
+            </a:r>
+            <a:br/>
+            <a:r>
+              <a:t>持倉期: 10 年 (45→55歲)</a:t>
             </a:r>
             <a:br/>
             <a:r>
@@ -3460,7 +3464,7 @@
             </a:r>
             <a:br/>
             <a:r>
-              <a:t>  範圍: 15年 -30% ~ +80%</a:t>
+              <a:t>  範圍: 10 年 -30% ~ +80%</a:t>
             </a:r>
           </a:p>
         </p:txBody>
@@ -3550,7 +3554,7 @@
           <a:lstStyle/>
           <a:p>
             <a:pPr algn="l">
-              <a:defRPr sz="2600" b="1">
+              <a:defRPr sz="2400" b="1">
                 <a:solidFill>
                   <a:srgbClr val="FFFFFF"/>
                 </a:solidFill>
@@ -3558,7 +3562,7 @@
               </a:defRPr>
             </a:pPr>
             <a:r>
-              <a:t>雙變量壓力測試 — 84個情景年化回報矩陣</a:t>
+              <a:t>雙變量壓力測試 — 84個情景年化回報矩陣 (10 年)</a:t>
             </a:r>
           </a:p>
         </p:txBody>
@@ -3623,7 +3627,7 @@
         <p:spPr>
           <a:xfrm>
             <a:off x="182880" y="914400"/>
-            <a:ext cx="11795760" cy="5120640"/>
+            <a:ext cx="11795760" cy="4937760"/>
           </a:xfrm>
           <a:prstGeom prst="rect">
             <a:avLst/>
@@ -3638,8 +3642,8 @@
         </p:nvSpPr>
         <p:spPr>
           <a:xfrm>
-            <a:off x="457200" y="6080760"/>
-            <a:ext cx="3474720" cy="457200"/>
+            <a:off x="457200" y="5897880"/>
+            <a:ext cx="3474720" cy="411480"/>
           </a:xfrm>
           <a:prstGeom prst="roundRect">
             <a:avLst/>
@@ -3681,7 +3685,7 @@
         </p:nvSpPr>
         <p:spPr>
           <a:xfrm>
-            <a:off x="548640" y="6108192"/>
+            <a:off x="548640" y="5916168"/>
             <a:ext cx="3291840" cy="365760"/>
           </a:xfrm>
           <a:prstGeom prst="rect">
@@ -3704,7 +3708,7 @@
               </a:defRPr>
             </a:pPr>
             <a:r>
-              <a:t>最差情景: 2.2% 年化</a:t>
+              <a:t>最差情景: 0.35% 年化</a:t>
             </a:r>
           </a:p>
         </p:txBody>
@@ -3717,8 +3721,8 @@
         </p:nvSpPr>
         <p:spPr>
           <a:xfrm>
-            <a:off x="4297680" y="6080760"/>
-            <a:ext cx="3474720" cy="457200"/>
+            <a:off x="4297680" y="5897880"/>
+            <a:ext cx="3474720" cy="411480"/>
           </a:xfrm>
           <a:prstGeom prst="roundRect">
             <a:avLst/>
@@ -3760,7 +3764,7 @@
         </p:nvSpPr>
         <p:spPr>
           <a:xfrm>
-            <a:off x="4389120" y="6108192"/>
+            <a:off x="4389120" y="5916168"/>
             <a:ext cx="3291840" cy="365760"/>
           </a:xfrm>
           <a:prstGeom prst="rect">
@@ -3796,8 +3800,8 @@
         </p:nvSpPr>
         <p:spPr>
           <a:xfrm>
-            <a:off x="8138160" y="6080760"/>
-            <a:ext cx="3566160" cy="457200"/>
+            <a:off x="8138160" y="5897880"/>
+            <a:ext cx="3566160" cy="411480"/>
           </a:xfrm>
           <a:prstGeom prst="roundRect">
             <a:avLst/>
@@ -3839,7 +3843,7 @@
         </p:nvSpPr>
         <p:spPr>
           <a:xfrm>
-            <a:off x="8229600" y="6108192"/>
+            <a:off x="8229600" y="5916168"/>
             <a:ext cx="3383280" cy="365760"/>
           </a:xfrm>
           <a:prstGeom prst="rect">
@@ -3862,7 +3866,7 @@
               </a:defRPr>
             </a:pPr>
             <a:r>
-              <a:t>基準情景: 5.83% 年化</a:t>
+              <a:t>基準情景: 6.39% 年化</a:t>
             </a:r>
           </a:p>
         </p:txBody>
@@ -3952,7 +3956,7 @@
           <a:lstStyle/>
           <a:p>
             <a:pPr algn="l">
-              <a:defRPr sz="2600" b="1">
+              <a:defRPr sz="2400" b="1">
                 <a:solidFill>
                   <a:srgbClr val="FFFFFF"/>
                 </a:solidFill>
@@ -3960,7 +3964,7 @@
               </a:defRPr>
             </a:pPr>
             <a:r>
-              <a:t>不同房價情景下的匯率敏感度曲線</a:t>
+              <a:t>不同房價情景下的匯率敏感度曲線 (10 年)</a:t>
             </a:r>
           </a:p>
         </p:txBody>
@@ -4117,7 +4121,7 @@
           <a:lstStyle/>
           <a:p>
             <a:pPr algn="l">
-              <a:defRPr sz="2600" b="1">
+              <a:defRPr sz="2400" b="1">
                 <a:solidFill>
                   <a:srgbClr val="FFFFFF"/>
                 </a:solidFill>
@@ -4125,7 +4129,7 @@
               </a:defRPr>
             </a:pPr>
             <a:r>
-              <a:t>盈虧平衡風險地圖 — FX Rate x Property Value</a:t>
+              <a:t>盈虧平衡風險地圖 — FX Rate x Property Value (10 年)</a:t>
             </a:r>
           </a:p>
         </p:txBody>
@@ -4282,7 +4286,7 @@
           <a:lstStyle/>
           <a:p>
             <a:pPr algn="l">
-              <a:defRPr sz="2600" b="1">
+              <a:defRPr sz="2400" b="1">
                 <a:solidFill>
                   <a:srgbClr val="FFFFFF"/>
                 </a:solidFill>
@@ -4290,7 +4294,7 @@
               </a:defRPr>
             </a:pPr>
             <a:r>
-              <a:t>壓力測試完整結果表</a:t>
+              <a:t>壓力測試完整結果表 (10 年年化回報)</a:t>
             </a:r>
           </a:p>
         </p:txBody>
@@ -4718,13 +4722,13 @@
                       <a:pPr algn="ctr">
                         <a:defRPr sz="850" b="0">
                           <a:solidFill>
-                            <a:srgbClr val="82E0AA"/>
-                          </a:solidFill>
-                          <a:latin typeface="Sarasa Mono SC"/>
-                        </a:defRPr>
-                      </a:pPr>
-                      <a:r>
-                        <a:t>6.08%</a:t>
+                            <a:srgbClr val="C9A84C"/>
+                          </a:solidFill>
+                          <a:latin typeface="Sarasa Mono SC"/>
+                        </a:defRPr>
+                      </a:pPr>
+                      <a:r>
+                        <a:t>6.11%</a:t>
                       </a:r>
                     </a:p>
                   </a:txBody>
@@ -4748,7 +4752,7 @@
                         </a:defRPr>
                       </a:pPr>
                       <a:r>
-                        <a:t>5.62%</a:t>
+                        <a:t>5.43%</a:t>
                       </a:r>
                     </a:p>
                   </a:txBody>
@@ -4766,13 +4770,13 @@
                       <a:pPr algn="ctr">
                         <a:defRPr sz="850" b="0">
                           <a:solidFill>
-                            <a:srgbClr val="C9A84C"/>
-                          </a:solidFill>
-                          <a:latin typeface="Sarasa Mono SC"/>
-                        </a:defRPr>
-                      </a:pPr>
-                      <a:r>
-                        <a:t>5.19%</a:t>
+                            <a:srgbClr val="F39C12"/>
+                          </a:solidFill>
+                          <a:latin typeface="Sarasa Mono SC"/>
+                        </a:defRPr>
+                      </a:pPr>
+                      <a:r>
+                        <a:t>4.79%</a:t>
                       </a:r>
                     </a:p>
                   </a:txBody>
@@ -4796,7 +4800,7 @@
                         </a:defRPr>
                       </a:pPr>
                       <a:r>
-                        <a:t>4.79%</a:t>
+                        <a:t>4.19%</a:t>
                       </a:r>
                     </a:p>
                   </a:txBody>
@@ -4820,7 +4824,7 @@
                         </a:defRPr>
                       </a:pPr>
                       <a:r>
-                        <a:t>4.42%</a:t>
+                        <a:t>3.63%</a:t>
                       </a:r>
                     </a:p>
                   </a:txBody>
@@ -4844,7 +4848,7 @@
                         </a:defRPr>
                       </a:pPr>
                       <a:r>
-                        <a:t>4.06%</a:t>
+                        <a:t>3.10%</a:t>
                       </a:r>
                     </a:p>
                   </a:txBody>
@@ -4862,13 +4866,13 @@
                       <a:pPr algn="ctr">
                         <a:defRPr sz="850" b="0">
                           <a:solidFill>
-                            <a:srgbClr val="F39C12"/>
-                          </a:solidFill>
-                          <a:latin typeface="Sarasa Mono SC"/>
-                        </a:defRPr>
-                      </a:pPr>
-                      <a:r>
-                        <a:t>3.72%</a:t>
+                            <a:srgbClr val="E74C3C"/>
+                          </a:solidFill>
+                          <a:latin typeface="Sarasa Mono SC"/>
+                        </a:defRPr>
+                      </a:pPr>
+                      <a:r>
+                        <a:t>2.60%</a:t>
                       </a:r>
                     </a:p>
                   </a:txBody>
@@ -4886,13 +4890,13 @@
                       <a:pPr algn="ctr">
                         <a:defRPr sz="850" b="0">
                           <a:solidFill>
-                            <a:srgbClr val="F39C12"/>
-                          </a:solidFill>
-                          <a:latin typeface="Sarasa Mono SC"/>
-                        </a:defRPr>
-                      </a:pPr>
-                      <a:r>
-                        <a:t>3.40%</a:t>
+                            <a:srgbClr val="E74C3C"/>
+                          </a:solidFill>
+                          <a:latin typeface="Sarasa Mono SC"/>
+                        </a:defRPr>
+                      </a:pPr>
+                      <a:r>
+                        <a:t>2.12%</a:t>
                       </a:r>
                     </a:p>
                   </a:txBody>
@@ -4910,13 +4914,13 @@
                       <a:pPr algn="ctr">
                         <a:defRPr sz="850" b="0">
                           <a:solidFill>
-                            <a:srgbClr val="F39C12"/>
-                          </a:solidFill>
-                          <a:latin typeface="Sarasa Mono SC"/>
-                        </a:defRPr>
-                      </a:pPr>
-                      <a:r>
-                        <a:t>3.09%</a:t>
+                            <a:srgbClr val="E74C3C"/>
+                          </a:solidFill>
+                          <a:latin typeface="Sarasa Mono SC"/>
+                        </a:defRPr>
+                      </a:pPr>
+                      <a:r>
+                        <a:t>1.67%</a:t>
                       </a:r>
                     </a:p>
                   </a:txBody>
@@ -4940,7 +4944,7 @@
                         </a:defRPr>
                       </a:pPr>
                       <a:r>
-                        <a:t>2.80%</a:t>
+                        <a:t>1.24%</a:t>
                       </a:r>
                     </a:p>
                   </a:txBody>
@@ -4964,7 +4968,7 @@
                         </a:defRPr>
                       </a:pPr>
                       <a:r>
-                        <a:t>2.26%</a:t>
+                        <a:t>0.43%</a:t>
                       </a:r>
                     </a:p>
                   </a:txBody>
@@ -4988,7 +4992,7 @@
                         </a:defRPr>
                       </a:pPr>
                       <a:r>
-                        <a:t>2.20%</a:t>
+                        <a:t>0.35%</a:t>
                       </a:r>
                     </a:p>
                   </a:txBody>
@@ -5038,7 +5042,7 @@
                         </a:defRPr>
                       </a:pPr>
                       <a:r>
-                        <a:t>7.06%</a:t>
+                        <a:t>7.92%</a:t>
                       </a:r>
                     </a:p>
                   </a:txBody>
@@ -5062,7 +5066,7 @@
                         </a:defRPr>
                       </a:pPr>
                       <a:r>
-                        <a:t>6.60%</a:t>
+                        <a:t>7.22%</a:t>
                       </a:r>
                     </a:p>
                   </a:txBody>
@@ -5080,13 +5084,13 @@
                       <a:pPr algn="ctr">
                         <a:defRPr sz="850" b="0">
                           <a:solidFill>
-                            <a:srgbClr val="82E0AA"/>
-                          </a:solidFill>
-                          <a:latin typeface="Sarasa Mono SC"/>
-                        </a:defRPr>
-                      </a:pPr>
-                      <a:r>
-                        <a:t>6.17%</a:t>
+                            <a:srgbClr val="C9A84C"/>
+                          </a:solidFill>
+                          <a:latin typeface="Sarasa Mono SC"/>
+                        </a:defRPr>
+                      </a:pPr>
+                      <a:r>
+                        <a:t>6.58%</a:t>
                       </a:r>
                     </a:p>
                   </a:txBody>
@@ -5110,7 +5114,7 @@
                         </a:defRPr>
                       </a:pPr>
                       <a:r>
-                        <a:t>5.77%</a:t>
+                        <a:t>5.97%</a:t>
                       </a:r>
                     </a:p>
                   </a:txBody>
@@ -5134,7 +5138,7 @@
                         </a:defRPr>
                       </a:pPr>
                       <a:r>
-                        <a:t>5.39%</a:t>
+                        <a:t>5.40%</a:t>
                       </a:r>
                     </a:p>
                   </a:txBody>
@@ -5152,13 +5156,13 @@
                       <a:pPr algn="ctr">
                         <a:defRPr sz="850" b="0">
                           <a:solidFill>
-                            <a:srgbClr val="C9A84C"/>
-                          </a:solidFill>
-                          <a:latin typeface="Sarasa Mono SC"/>
-                        </a:defRPr>
-                      </a:pPr>
-                      <a:r>
-                        <a:t>5.03%</a:t>
+                            <a:srgbClr val="F39C12"/>
+                          </a:solidFill>
+                          <a:latin typeface="Sarasa Mono SC"/>
+                        </a:defRPr>
+                      </a:pPr>
+                      <a:r>
+                        <a:t>4.86%</a:t>
                       </a:r>
                     </a:p>
                   </a:txBody>
@@ -5182,7 +5186,7 @@
                         </a:defRPr>
                       </a:pPr>
                       <a:r>
-                        <a:t>4.69%</a:t>
+                        <a:t>4.35%</a:t>
                       </a:r>
                     </a:p>
                   </a:txBody>
@@ -5206,7 +5210,7 @@
                         </a:defRPr>
                       </a:pPr>
                       <a:r>
-                        <a:t>4.36%</a:t>
+                        <a:t>3.86%</a:t>
                       </a:r>
                     </a:p>
                   </a:txBody>
@@ -5230,7 +5234,7 @@
                         </a:defRPr>
                       </a:pPr>
                       <a:r>
-                        <a:t>4.05%</a:t>
+                        <a:t>3.40%</a:t>
                       </a:r>
                     </a:p>
                   </a:txBody>
@@ -5248,13 +5252,13 @@
                       <a:pPr algn="ctr">
                         <a:defRPr sz="850" b="0">
                           <a:solidFill>
-                            <a:srgbClr val="F39C12"/>
-                          </a:solidFill>
-                          <a:latin typeface="Sarasa Mono SC"/>
-                        </a:defRPr>
-                      </a:pPr>
-                      <a:r>
-                        <a:t>3.76%</a:t>
+                            <a:srgbClr val="E74C3C"/>
+                          </a:solidFill>
+                          <a:latin typeface="Sarasa Mono SC"/>
+                        </a:defRPr>
+                      </a:pPr>
+                      <a:r>
+                        <a:t>2.96%</a:t>
                       </a:r>
                     </a:p>
                   </a:txBody>
@@ -5272,13 +5276,13 @@
                       <a:pPr algn="ctr">
                         <a:defRPr sz="850" b="0">
                           <a:solidFill>
-                            <a:srgbClr val="F39C12"/>
-                          </a:solidFill>
-                          <a:latin typeface="Sarasa Mono SC"/>
-                        </a:defRPr>
-                      </a:pPr>
-                      <a:r>
-                        <a:t>3.21%</a:t>
+                            <a:srgbClr val="E74C3C"/>
+                          </a:solidFill>
+                          <a:latin typeface="Sarasa Mono SC"/>
+                        </a:defRPr>
+                      </a:pPr>
+                      <a:r>
+                        <a:t>2.14%</a:t>
                       </a:r>
                     </a:p>
                   </a:txBody>
@@ -5296,13 +5300,13 @@
                       <a:pPr algn="ctr">
                         <a:defRPr sz="850" b="0">
                           <a:solidFill>
-                            <a:srgbClr val="F39C12"/>
-                          </a:solidFill>
-                          <a:latin typeface="Sarasa Mono SC"/>
-                        </a:defRPr>
-                      </a:pPr>
-                      <a:r>
-                        <a:t>3.15%</a:t>
+                            <a:srgbClr val="E74C3C"/>
+                          </a:solidFill>
+                          <a:latin typeface="Sarasa Mono SC"/>
+                        </a:defRPr>
+                      </a:pPr>
+                      <a:r>
+                        <a:t>2.06%</a:t>
                       </a:r>
                     </a:p>
                   </a:txBody>
@@ -5352,7 +5356,7 @@
                         </a:defRPr>
                       </a:pPr>
                       <a:r>
-                        <a:t>7.87%</a:t>
+                        <a:t>9.50%</a:t>
                       </a:r>
                     </a:p>
                   </a:txBody>
@@ -5376,7 +5380,7 @@
                         </a:defRPr>
                       </a:pPr>
                       <a:r>
-                        <a:t>7.41%</a:t>
+                        <a:t>8.79%</a:t>
                       </a:r>
                     </a:p>
                   </a:txBody>
@@ -5400,7 +5404,7 @@
                         </a:defRPr>
                       </a:pPr>
                       <a:r>
-                        <a:t>6.98%</a:t>
+                        <a:t>8.13%</a:t>
                       </a:r>
                     </a:p>
                   </a:txBody>
@@ -5424,7 +5428,7 @@
                         </a:defRPr>
                       </a:pPr>
                       <a:r>
-                        <a:t>6.57%</a:t>
+                        <a:t>7.52%</a:t>
                       </a:r>
                     </a:p>
                   </a:txBody>
@@ -5442,13 +5446,13 @@
                       <a:pPr algn="ctr">
                         <a:defRPr sz="850" b="0">
                           <a:solidFill>
-                            <a:srgbClr val="82E0AA"/>
-                          </a:solidFill>
-                          <a:latin typeface="Sarasa Mono SC"/>
-                        </a:defRPr>
-                      </a:pPr>
-                      <a:r>
-                        <a:t>6.19%</a:t>
+                            <a:srgbClr val="C9A84C"/>
+                          </a:solidFill>
+                          <a:latin typeface="Sarasa Mono SC"/>
+                        </a:defRPr>
+                      </a:pPr>
+                      <a:r>
+                        <a:t>6.94%</a:t>
                       </a:r>
                     </a:p>
                   </a:txBody>
@@ -5472,7 +5476,7 @@
                         </a:defRPr>
                       </a:pPr>
                       <a:r>
-                        <a:t>5.83%</a:t>
+                        <a:t>6.39%</a:t>
                       </a:r>
                     </a:p>
                   </a:txBody>
@@ -5496,7 +5500,7 @@
                         </a:defRPr>
                       </a:pPr>
                       <a:r>
-                        <a:t>5.48%</a:t>
+                        <a:t>5.87%</a:t>
                       </a:r>
                     </a:p>
                   </a:txBody>
@@ -5520,7 +5524,7 @@
                         </a:defRPr>
                       </a:pPr>
                       <a:r>
-                        <a:t>5.15%</a:t>
+                        <a:t>5.38%</a:t>
                       </a:r>
                     </a:p>
                   </a:txBody>
@@ -5544,7 +5548,7 @@
                         </a:defRPr>
                       </a:pPr>
                       <a:r>
-                        <a:t>4.84%</a:t>
+                        <a:t>4.91%</a:t>
                       </a:r>
                     </a:p>
                   </a:txBody>
@@ -5568,7 +5572,7 @@
                         </a:defRPr>
                       </a:pPr>
                       <a:r>
-                        <a:t>4.55%</a:t>
+                        <a:t>4.47%</a:t>
                       </a:r>
                     </a:p>
                   </a:txBody>
@@ -5592,7 +5596,7 @@
                         </a:defRPr>
                       </a:pPr>
                       <a:r>
-                        <a:t>3.99%</a:t>
+                        <a:t>3.64%</a:t>
                       </a:r>
                     </a:p>
                   </a:txBody>
@@ -5616,7 +5620,7 @@
                         </a:defRPr>
                       </a:pPr>
                       <a:r>
-                        <a:t>3.94%</a:t>
+                        <a:t>3.56%</a:t>
                       </a:r>
                     </a:p>
                   </a:txBody>
@@ -5666,7 +5670,7 @@
                         </a:defRPr>
                       </a:pPr>
                       <a:r>
-                        <a:t>8.61%</a:t>
+                        <a:t>10.89%</a:t>
                       </a:r>
                     </a:p>
                   </a:txBody>
@@ -5690,7 +5694,7 @@
                         </a:defRPr>
                       </a:pPr>
                       <a:r>
-                        <a:t>8.14%</a:t>
+                        <a:t>10.18%</a:t>
                       </a:r>
                     </a:p>
                   </a:txBody>
@@ -5714,7 +5718,7 @@
                         </a:defRPr>
                       </a:pPr>
                       <a:r>
-                        <a:t>7.71%</a:t>
+                        <a:t>9.51%</a:t>
                       </a:r>
                     </a:p>
                   </a:txBody>
@@ -5738,7 +5742,7 @@
                         </a:defRPr>
                       </a:pPr>
                       <a:r>
-                        <a:t>7.30%</a:t>
+                        <a:t>8.89%</a:t>
                       </a:r>
                     </a:p>
                   </a:txBody>
@@ -5762,7 +5766,7 @@
                         </a:defRPr>
                       </a:pPr>
                       <a:r>
-                        <a:t>6.91%</a:t>
+                        <a:t>8.30%</a:t>
                       </a:r>
                     </a:p>
                   </a:txBody>
@@ -5786,7 +5790,7 @@
                         </a:defRPr>
                       </a:pPr>
                       <a:r>
-                        <a:t>6.55%</a:t>
+                        <a:t>7.74%</a:t>
                       </a:r>
                     </a:p>
                   </a:txBody>
@@ -5810,7 +5814,7 @@
                         </a:defRPr>
                       </a:pPr>
                       <a:r>
-                        <a:t>6.20%</a:t>
+                        <a:t>7.22%</a:t>
                       </a:r>
                     </a:p>
                   </a:txBody>
@@ -5834,7 +5838,7 @@
                         </a:defRPr>
                       </a:pPr>
                       <a:r>
-                        <a:t>5.87%</a:t>
+                        <a:t>6.72%</a:t>
                       </a:r>
                     </a:p>
                   </a:txBody>
@@ -5858,7 +5862,7 @@
                         </a:defRPr>
                       </a:pPr>
                       <a:r>
-                        <a:t>5.56%</a:t>
+                        <a:t>6.25%</a:t>
                       </a:r>
                     </a:p>
                   </a:txBody>
@@ -5882,7 +5886,7 @@
                         </a:defRPr>
                       </a:pPr>
                       <a:r>
-                        <a:t>5.26%</a:t>
+                        <a:t>5.80%</a:t>
                       </a:r>
                     </a:p>
                   </a:txBody>
@@ -5906,7 +5910,7 @@
                         </a:defRPr>
                       </a:pPr>
                       <a:r>
-                        <a:t>4.70%</a:t>
+                        <a:t>4.95%</a:t>
                       </a:r>
                     </a:p>
                   </a:txBody>
@@ -5930,7 +5934,7 @@
                         </a:defRPr>
                       </a:pPr>
                       <a:r>
-                        <a:t>4.65%</a:t>
+                        <a:t>4.87%</a:t>
                       </a:r>
                     </a:p>
                   </a:txBody>
@@ -5980,7 +5984,7 @@
                         </a:defRPr>
                       </a:pPr>
                       <a:r>
-                        <a:t>9.28%</a:t>
+                        <a:t>12.14%</a:t>
                       </a:r>
                     </a:p>
                   </a:txBody>
@@ -6004,7 +6008,7 @@
                         </a:defRPr>
                       </a:pPr>
                       <a:r>
-                        <a:t>8.81%</a:t>
+                        <a:t>11.42%</a:t>
                       </a:r>
                     </a:p>
                   </a:txBody>
@@ -6028,7 +6032,7 @@
                         </a:defRPr>
                       </a:pPr>
                       <a:r>
-                        <a:t>8.37%</a:t>
+                        <a:t>10.74%</a:t>
                       </a:r>
                     </a:p>
                   </a:txBody>
@@ -6046,13 +6050,37 @@
                       <a:pPr algn="ctr">
                         <a:defRPr sz="850" b="0">
                           <a:solidFill>
+                            <a:srgbClr val="2ECC71"/>
+                          </a:solidFill>
+                          <a:latin typeface="Sarasa Mono SC"/>
+                        </a:defRPr>
+                      </a:pPr>
+                      <a:r>
+                        <a:t>10.11%</a:t>
+                      </a:r>
+                    </a:p>
+                  </a:txBody>
+                  <a:tcPr>
+                    <a:solidFill>
+                      <a:srgbClr val="202228"/>
+                    </a:solidFill>
+                  </a:tcPr>
+                </a:tc>
+                <a:tc>
+                  <a:txBody>
+                    <a:bodyPr/>
+                    <a:lstStyle/>
+                    <a:p>
+                      <a:pPr algn="ctr">
+                        <a:defRPr sz="850" b="0">
+                          <a:solidFill>
                             <a:srgbClr val="82E0AA"/>
                           </a:solidFill>
                           <a:latin typeface="Sarasa Mono SC"/>
                         </a:defRPr>
                       </a:pPr>
                       <a:r>
-                        <a:t>7.96%</a:t>
+                        <a:t>9.52%</a:t>
                       </a:r>
                     </a:p>
                   </a:txBody>
@@ -6076,7 +6104,7 @@
                         </a:defRPr>
                       </a:pPr>
                       <a:r>
-                        <a:t>7.57%</a:t>
+                        <a:t>8.96%</a:t>
                       </a:r>
                     </a:p>
                   </a:txBody>
@@ -6100,7 +6128,7 @@
                         </a:defRPr>
                       </a:pPr>
                       <a:r>
-                        <a:t>7.21%</a:t>
+                        <a:t>8.43%</a:t>
                       </a:r>
                     </a:p>
                   </a:txBody>
@@ -6124,7 +6152,7 @@
                         </a:defRPr>
                       </a:pPr>
                       <a:r>
-                        <a:t>6.86%</a:t>
+                        <a:t>7.92%</a:t>
                       </a:r>
                     </a:p>
                   </a:txBody>
@@ -6148,7 +6176,7 @@
                         </a:defRPr>
                       </a:pPr>
                       <a:r>
-                        <a:t>6.53%</a:t>
+                        <a:t>7.45%</a:t>
                       </a:r>
                     </a:p>
                   </a:txBody>
@@ -6166,13 +6194,13 @@
                       <a:pPr algn="ctr">
                         <a:defRPr sz="850" b="0">
                           <a:solidFill>
-                            <a:srgbClr val="82E0AA"/>
-                          </a:solidFill>
-                          <a:latin typeface="Sarasa Mono SC"/>
-                        </a:defRPr>
-                      </a:pPr>
-                      <a:r>
-                        <a:t>6.21%</a:t>
+                            <a:srgbClr val="C9A84C"/>
+                          </a:solidFill>
+                          <a:latin typeface="Sarasa Mono SC"/>
+                        </a:defRPr>
+                      </a:pPr>
+                      <a:r>
+                        <a:t>6.99%</a:t>
                       </a:r>
                     </a:p>
                   </a:txBody>
@@ -6196,7 +6224,7 @@
                         </a:defRPr>
                       </a:pPr>
                       <a:r>
-                        <a:t>5.91%</a:t>
+                        <a:t>6.14%</a:t>
                       </a:r>
                     </a:p>
                   </a:txBody>
@@ -6220,31 +6248,7 @@
                         </a:defRPr>
                       </a:pPr>
                       <a:r>
-                        <a:t>5.35%</a:t>
-                      </a:r>
-                    </a:p>
-                  </a:txBody>
-                  <a:tcPr>
-                    <a:solidFill>
-                      <a:srgbClr val="202228"/>
-                    </a:solidFill>
-                  </a:tcPr>
-                </a:tc>
-                <a:tc>
-                  <a:txBody>
-                    <a:bodyPr/>
-                    <a:lstStyle/>
-                    <a:p>
-                      <a:pPr algn="ctr">
-                        <a:defRPr sz="850" b="0">
-                          <a:solidFill>
-                            <a:srgbClr val="C9A84C"/>
-                          </a:solidFill>
-                          <a:latin typeface="Sarasa Mono SC"/>
-                        </a:defRPr>
-                      </a:pPr>
-                      <a:r>
-                        <a:t>5.29%</a:t>
+                        <a:t>6.06%</a:t>
                       </a:r>
                     </a:p>
                   </a:txBody>
@@ -6294,7 +6298,7 @@
                         </a:defRPr>
                       </a:pPr>
                       <a:r>
-                        <a:t>10.09%</a:t>
+                        <a:t>13.63%</a:t>
                       </a:r>
                     </a:p>
                   </a:txBody>
@@ -6318,7 +6322,7 @@
                         </a:defRPr>
                       </a:pPr>
                       <a:r>
-                        <a:t>9.62%</a:t>
+                        <a:t>12.90%</a:t>
                       </a:r>
                     </a:p>
                   </a:txBody>
@@ -6342,7 +6346,7 @@
                         </a:defRPr>
                       </a:pPr>
                       <a:r>
-                        <a:t>9.17%</a:t>
+                        <a:t>12.22%</a:t>
                       </a:r>
                     </a:p>
                   </a:txBody>
@@ -6366,7 +6370,7 @@
                         </a:defRPr>
                       </a:pPr>
                       <a:r>
-                        <a:t>8.76%</a:t>
+                        <a:t>11.58%</a:t>
                       </a:r>
                     </a:p>
                   </a:txBody>
@@ -6390,7 +6394,7 @@
                         </a:defRPr>
                       </a:pPr>
                       <a:r>
-                        <a:t>8.37%</a:t>
+                        <a:t>10.98%</a:t>
                       </a:r>
                     </a:p>
                   </a:txBody>
@@ -6408,13 +6412,37 @@
                       <a:pPr algn="ctr">
                         <a:defRPr sz="850" b="0">
                           <a:solidFill>
+                            <a:srgbClr val="2ECC71"/>
+                          </a:solidFill>
+                          <a:latin typeface="Sarasa Mono SC"/>
+                        </a:defRPr>
+                      </a:pPr>
+                      <a:r>
+                        <a:t>10.41%</a:t>
+                      </a:r>
+                    </a:p>
+                  </a:txBody>
+                  <a:tcPr>
+                    <a:solidFill>
+                      <a:srgbClr val="202228"/>
+                    </a:solidFill>
+                  </a:tcPr>
+                </a:tc>
+                <a:tc>
+                  <a:txBody>
+                    <a:bodyPr/>
+                    <a:lstStyle/>
+                    <a:p>
+                      <a:pPr algn="ctr">
+                        <a:defRPr sz="850" b="0">
+                          <a:solidFill>
                             <a:srgbClr val="82E0AA"/>
                           </a:solidFill>
                           <a:latin typeface="Sarasa Mono SC"/>
                         </a:defRPr>
                       </a:pPr>
                       <a:r>
-                        <a:t>8.00%</a:t>
+                        <a:t>9.87%</a:t>
                       </a:r>
                     </a:p>
                   </a:txBody>
@@ -6438,7 +6466,7 @@
                         </a:defRPr>
                       </a:pPr>
                       <a:r>
-                        <a:t>7.65%</a:t>
+                        <a:t>9.36%</a:t>
                       </a:r>
                     </a:p>
                   </a:txBody>
@@ -6462,7 +6490,7 @@
                         </a:defRPr>
                       </a:pPr>
                       <a:r>
-                        <a:t>7.31%</a:t>
+                        <a:t>8.88%</a:t>
                       </a:r>
                     </a:p>
                   </a:txBody>
@@ -6486,7 +6514,7 @@
                         </a:defRPr>
                       </a:pPr>
                       <a:r>
-                        <a:t>7.00%</a:t>
+                        <a:t>8.41%</a:t>
                       </a:r>
                     </a:p>
                   </a:txBody>
@@ -6510,7 +6538,7 @@
                         </a:defRPr>
                       </a:pPr>
                       <a:r>
-                        <a:t>6.69%</a:t>
+                        <a:t>7.55%</a:t>
                       </a:r>
                     </a:p>
                   </a:txBody>
@@ -6534,31 +6562,7 @@
                         </a:defRPr>
                       </a:pPr>
                       <a:r>
-                        <a:t>6.13%</a:t>
-                      </a:r>
-                    </a:p>
-                  </a:txBody>
-                  <a:tcPr>
-                    <a:solidFill>
-                      <a:srgbClr val="202228"/>
-                    </a:solidFill>
-                  </a:tcPr>
-                </a:tc>
-                <a:tc>
-                  <a:txBody>
-                    <a:bodyPr/>
-                    <a:lstStyle/>
-                    <a:p>
-                      <a:pPr algn="ctr">
-                        <a:defRPr sz="850" b="0">
-                          <a:solidFill>
-                            <a:srgbClr val="82E0AA"/>
-                          </a:solidFill>
-                          <a:latin typeface="Sarasa Mono SC"/>
-                        </a:defRPr>
-                      </a:pPr>
-                      <a:r>
-                        <a:t>6.07%</a:t>
+                        <a:t>7.47%</a:t>
                       </a:r>
                     </a:p>
                   </a:txBody>
@@ -6608,7 +6612,7 @@
                         </a:defRPr>
                       </a:pPr>
                       <a:r>
-                        <a:t>11.15%</a:t>
+                        <a:t>15.59%</a:t>
                       </a:r>
                     </a:p>
                   </a:txBody>
@@ -6632,7 +6636,7 @@
                         </a:defRPr>
                       </a:pPr>
                       <a:r>
-                        <a:t>10.68%</a:t>
+                        <a:t>14.84%</a:t>
                       </a:r>
                     </a:p>
                   </a:txBody>
@@ -6656,7 +6660,7 @@
                         </a:defRPr>
                       </a:pPr>
                       <a:r>
-                        <a:t>10.23%</a:t>
+                        <a:t>14.15%</a:t>
                       </a:r>
                     </a:p>
                   </a:txBody>
@@ -6680,7 +6684,7 @@
                         </a:defRPr>
                       </a:pPr>
                       <a:r>
-                        <a:t>9.81%</a:t>
+                        <a:t>13.50%</a:t>
                       </a:r>
                     </a:p>
                   </a:txBody>
@@ -6704,7 +6708,7 @@
                         </a:defRPr>
                       </a:pPr>
                       <a:r>
-                        <a:t>9.42%</a:t>
+                        <a:t>12.89%</a:t>
                       </a:r>
                     </a:p>
                   </a:txBody>
@@ -6728,7 +6732,7 @@
                         </a:defRPr>
                       </a:pPr>
                       <a:r>
-                        <a:t>9.04%</a:t>
+                        <a:t>12.31%</a:t>
                       </a:r>
                     </a:p>
                   </a:txBody>
@@ -6752,7 +6756,7 @@
                         </a:defRPr>
                       </a:pPr>
                       <a:r>
-                        <a:t>8.69%</a:t>
+                        <a:t>11.76%</a:t>
                       </a:r>
                     </a:p>
                   </a:txBody>
@@ -6776,7 +6780,7 @@
                         </a:defRPr>
                       </a:pPr>
                       <a:r>
-                        <a:t>8.35%</a:t>
+                        <a:t>11.25%</a:t>
                       </a:r>
                     </a:p>
                   </a:txBody>
@@ -6800,7 +6804,7 @@
                         </a:defRPr>
                       </a:pPr>
                       <a:r>
-                        <a:t>8.03%</a:t>
+                        <a:t>10.75%</a:t>
                       </a:r>
                     </a:p>
                   </a:txBody>
@@ -6818,13 +6822,37 @@
                       <a:pPr algn="ctr">
                         <a:defRPr sz="850" b="0">
                           <a:solidFill>
+                            <a:srgbClr val="2ECC71"/>
+                          </a:solidFill>
+                          <a:latin typeface="Sarasa Mono SC"/>
+                        </a:defRPr>
+                      </a:pPr>
+                      <a:r>
+                        <a:t>10.28%</a:t>
+                      </a:r>
+                    </a:p>
+                  </a:txBody>
+                  <a:tcPr>
+                    <a:solidFill>
+                      <a:srgbClr val="202228"/>
+                    </a:solidFill>
+                  </a:tcPr>
+                </a:tc>
+                <a:tc>
+                  <a:txBody>
+                    <a:bodyPr/>
+                    <a:lstStyle/>
+                    <a:p>
+                      <a:pPr algn="ctr">
+                        <a:defRPr sz="850" b="0">
+                          <a:solidFill>
                             <a:srgbClr val="82E0AA"/>
                           </a:solidFill>
                           <a:latin typeface="Sarasa Mono SC"/>
                         </a:defRPr>
                       </a:pPr>
                       <a:r>
-                        <a:t>7.73%</a:t>
+                        <a:t>9.40%</a:t>
                       </a:r>
                     </a:p>
                   </a:txBody>
@@ -6848,31 +6876,7 @@
                         </a:defRPr>
                       </a:pPr>
                       <a:r>
-                        <a:t>7.15%</a:t>
-                      </a:r>
-                    </a:p>
-                  </a:txBody>
-                  <a:tcPr>
-                    <a:solidFill>
-                      <a:srgbClr val="202228"/>
-                    </a:solidFill>
-                  </a:tcPr>
-                </a:tc>
-                <a:tc>
-                  <a:txBody>
-                    <a:bodyPr/>
-                    <a:lstStyle/>
-                    <a:p>
-                      <a:pPr algn="ctr">
-                        <a:defRPr sz="850" b="0">
-                          <a:solidFill>
-                            <a:srgbClr val="82E0AA"/>
-                          </a:solidFill>
-                          <a:latin typeface="Sarasa Mono SC"/>
-                        </a:defRPr>
-                      </a:pPr>
-                      <a:r>
-                        <a:t>7.10%</a:t>
+                        <a:t>9.32%</a:t>
                       </a:r>
                     </a:p>
                   </a:txBody>
@@ -6972,7 +6976,7 @@
           <a:lstStyle/>
           <a:p>
             <a:pPr algn="l">
-              <a:defRPr sz="2600" b="1">
+              <a:defRPr sz="2400" b="1">
                 <a:solidFill>
                   <a:srgbClr val="FFFFFF"/>
                 </a:solidFill>
@@ -6980,7 +6984,7 @@
               </a:defRPr>
             </a:pPr>
             <a:r>
-              <a:t>壓力測試結論與風險評估</a:t>
+              <a:t>壓力測試結論與風險評估 (10 年持倉)</a:t>
             </a:r>
           </a:p>
         </p:txBody>
@@ -7037,7 +7041,7 @@
         <p:spPr>
           <a:xfrm>
             <a:off x="457200" y="1051560"/>
-            <a:ext cx="6858000" cy="822960"/>
+            <a:ext cx="6858000" cy="804672"/>
           </a:xfrm>
           <a:prstGeom prst="roundRect">
             <a:avLst/>
@@ -7082,7 +7086,7 @@
         <p:spPr>
           <a:xfrm>
             <a:off x="640080" y="1097280"/>
-            <a:ext cx="1828800" cy="320040"/>
+            <a:ext cx="1828800" cy="274320"/>
           </a:xfrm>
           <a:prstGeom prst="rect">
             <a:avLst/>
@@ -7096,7 +7100,7 @@
           <a:lstStyle/>
           <a:p>
             <a:pPr algn="l">
-              <a:defRPr sz="1200" b="1">
+              <a:defRPr sz="1150" b="1">
                 <a:solidFill>
                   <a:srgbClr val="1E3A5F"/>
                 </a:solidFill>
@@ -7117,7 +7121,7 @@
         </p:nvSpPr>
         <p:spPr>
           <a:xfrm>
-            <a:off x="640080" y="1371600"/>
+            <a:off x="640080" y="1344168"/>
             <a:ext cx="6400800" cy="502920"/>
           </a:xfrm>
           <a:prstGeom prst="rect">
@@ -7132,7 +7136,7 @@
           <a:lstStyle/>
           <a:p>
             <a:pPr algn="l">
-              <a:defRPr sz="950" b="0">
+              <a:defRPr sz="900" b="0">
                 <a:solidFill>
                   <a:srgbClr val="F5F2E8"/>
                 </a:solidFill>
@@ -7157,8 +7161,8 @@
         </p:nvSpPr>
         <p:spPr>
           <a:xfrm>
-            <a:off x="457200" y="1920240"/>
-            <a:ext cx="6858000" cy="822960"/>
+            <a:off x="457200" y="1892808"/>
+            <a:ext cx="6858000" cy="804672"/>
           </a:xfrm>
           <a:prstGeom prst="roundRect">
             <a:avLst/>
@@ -7202,8 +7206,8 @@
         </p:nvSpPr>
         <p:spPr>
           <a:xfrm>
-            <a:off x="640080" y="1965960"/>
-            <a:ext cx="1828800" cy="320040"/>
+            <a:off x="640080" y="1938528"/>
+            <a:ext cx="1828800" cy="274320"/>
           </a:xfrm>
           <a:prstGeom prst="rect">
             <a:avLst/>
@@ -7217,7 +7221,7 @@
           <a:lstStyle/>
           <a:p>
             <a:pPr algn="l">
-              <a:defRPr sz="1200" b="1">
+              <a:defRPr sz="1150" b="1">
                 <a:solidFill>
                   <a:srgbClr val="2ECC71"/>
                 </a:solidFill>
@@ -7238,7 +7242,7 @@
         </p:nvSpPr>
         <p:spPr>
           <a:xfrm>
-            <a:off x="640080" y="2240280"/>
+            <a:off x="640080" y="2185416"/>
             <a:ext cx="6400800" cy="502920"/>
           </a:xfrm>
           <a:prstGeom prst="rect">
@@ -7253,7 +7257,7 @@
           <a:lstStyle/>
           <a:p>
             <a:pPr algn="l">
-              <a:defRPr sz="950" b="0">
+              <a:defRPr sz="900" b="0">
                 <a:solidFill>
                   <a:srgbClr val="F5F2E8"/>
                 </a:solidFill>
@@ -7261,7 +7265,7 @@
               </a:defRPr>
             </a:pPr>
             <a:r>
-              <a:t>全部84個情景均錄得正回報，最差年化仍達2.20%</a:t>
+              <a:t>全部84個情景均錄得正回報，最差年化仍達0.35%</a:t>
             </a:r>
             <a:br/>
             <a:r>
@@ -7278,8 +7282,8 @@
         </p:nvSpPr>
         <p:spPr>
           <a:xfrm>
-            <a:off x="457200" y="2788920"/>
-            <a:ext cx="6858000" cy="822960"/>
+            <a:off x="457200" y="2734056"/>
+            <a:ext cx="6858000" cy="804672"/>
           </a:xfrm>
           <a:prstGeom prst="roundRect">
             <a:avLst/>
@@ -7323,8 +7327,8 @@
         </p:nvSpPr>
         <p:spPr>
           <a:xfrm>
-            <a:off x="640080" y="2834640"/>
-            <a:ext cx="1828800" cy="320040"/>
+            <a:off x="640080" y="2779776"/>
+            <a:ext cx="1828800" cy="274320"/>
           </a:xfrm>
           <a:prstGeom prst="rect">
             <a:avLst/>
@@ -7338,7 +7342,7 @@
           <a:lstStyle/>
           <a:p>
             <a:pPr algn="l">
-              <a:defRPr sz="1200" b="1">
+              <a:defRPr sz="1150" b="1">
                 <a:solidFill>
                   <a:srgbClr val="C9A84C"/>
                 </a:solidFill>
@@ -7359,7 +7363,7 @@
         </p:nvSpPr>
         <p:spPr>
           <a:xfrm>
-            <a:off x="640080" y="3108960"/>
+            <a:off x="640080" y="3026664"/>
             <a:ext cx="6400800" cy="502920"/>
           </a:xfrm>
           <a:prstGeom prst="rect">
@@ -7374,7 +7378,7 @@
           <a:lstStyle/>
           <a:p>
             <a:pPr algn="l">
-              <a:defRPr sz="950" b="0">
+              <a:defRPr sz="900" b="0">
                 <a:solidFill>
                   <a:srgbClr val="F5F2E8"/>
                 </a:solidFill>
@@ -7382,11 +7386,11 @@
               </a:defRPr>
             </a:pPr>
             <a:r>
-              <a:t>房價持平 + 現匯率 = 年化5.83%（純租金）</a:t>
+              <a:t>房價持平 + 現匯率 = 年化6.39%</a:t>
             </a:r>
             <a:br/>
             <a:r>
-              <a:t>若房價年增3% + 現匯率 = 年化8.21%（含資本增值）</a:t>
+              <a:t>若房價年增3% + 現匯率 = 年化約8.5%+（含資本增值）</a:t>
             </a:r>
           </a:p>
         </p:txBody>
@@ -7399,8 +7403,8 @@
         </p:nvSpPr>
         <p:spPr>
           <a:xfrm>
-            <a:off x="457200" y="3657600"/>
-            <a:ext cx="6858000" cy="822960"/>
+            <a:off x="457200" y="3575304"/>
+            <a:ext cx="6858000" cy="804672"/>
           </a:xfrm>
           <a:prstGeom prst="roundRect">
             <a:avLst/>
@@ -7444,8 +7448,8 @@
         </p:nvSpPr>
         <p:spPr>
           <a:xfrm>
-            <a:off x="640080" y="3703320"/>
-            <a:ext cx="1828800" cy="320040"/>
+            <a:off x="640080" y="3621024"/>
+            <a:ext cx="1828800" cy="274320"/>
           </a:xfrm>
           <a:prstGeom prst="rect">
             <a:avLst/>
@@ -7459,7 +7463,7 @@
           <a:lstStyle/>
           <a:p>
             <a:pPr algn="l">
-              <a:defRPr sz="1200" b="1">
+              <a:defRPr sz="1150" b="1">
                 <a:solidFill>
                   <a:srgbClr val="1E3A5F"/>
                 </a:solidFill>
@@ -7480,7 +7484,7 @@
         </p:nvSpPr>
         <p:spPr>
           <a:xfrm>
-            <a:off x="640080" y="3977640"/>
+            <a:off x="640080" y="3867912"/>
             <a:ext cx="6400800" cy="502920"/>
           </a:xfrm>
           <a:prstGeom prst="rect">
@@ -7495,7 +7499,7 @@
           <a:lstStyle/>
           <a:p>
             <a:pPr algn="l">
-              <a:defRPr sz="950" b="0">
+              <a:defRPr sz="900" b="0">
                 <a:solidFill>
                   <a:srgbClr val="F5F2E8"/>
                 </a:solidFill>
@@ -7507,7 +7511,7 @@
             </a:r>
             <a:br/>
             <a:r>
-              <a:t>匯率風險僅影響淨租金及套現價值，非全部物業價值</a:t>
+              <a:t>匯率風險僅影響淨租金及淨套现價值，非全部物業價值</a:t>
             </a:r>
           </a:p>
         </p:txBody>
@@ -7520,8 +7524,8 @@
         </p:nvSpPr>
         <p:spPr>
           <a:xfrm>
-            <a:off x="457200" y="4526280"/>
-            <a:ext cx="6858000" cy="822960"/>
+            <a:off x="457200" y="4416552"/>
+            <a:ext cx="6858000" cy="804672"/>
           </a:xfrm>
           <a:prstGeom prst="roundRect">
             <a:avLst/>
@@ -7565,8 +7569,8 @@
         </p:nvSpPr>
         <p:spPr>
           <a:xfrm>
-            <a:off x="640080" y="4572000"/>
-            <a:ext cx="1828800" cy="320040"/>
+            <a:off x="640080" y="4462272"/>
+            <a:ext cx="1828800" cy="274320"/>
           </a:xfrm>
           <a:prstGeom prst="rect">
             <a:avLst/>
@@ -7580,7 +7584,7 @@
           <a:lstStyle/>
           <a:p>
             <a:pPr algn="l">
-              <a:defRPr sz="1200" b="1">
+              <a:defRPr sz="1150" b="1">
                 <a:solidFill>
                   <a:srgbClr val="3498DB"/>
                 </a:solidFill>
@@ -7588,7 +7592,7 @@
               </a:defRPr>
             </a:pPr>
             <a:r>
-              <a:t>槓極安全邊際</a:t>
+              <a:t>槓端安全邊際</a:t>
             </a:r>
           </a:p>
         </p:txBody>
@@ -7601,7 +7605,7 @@
         </p:nvSpPr>
         <p:spPr>
           <a:xfrm>
-            <a:off x="640080" y="4846320"/>
+            <a:off x="640080" y="4709160"/>
             <a:ext cx="6400800" cy="502920"/>
           </a:xfrm>
           <a:prstGeom prst="rect">
@@ -7616,7 +7620,7 @@
           <a:lstStyle/>
           <a:p>
             <a:pPr algn="l">
-              <a:defRPr sz="950" b="0">
+              <a:defRPr sz="900" b="0">
                 <a:solidFill>
                   <a:srgbClr val="F5F2E8"/>
                 </a:solidFill>
@@ -7628,7 +7632,7 @@
             </a:r>
             <a:br/>
             <a:r>
-              <a:t>按提本金償還持續降低貸款餘額，15年後完全清償</a:t>
+              <a:t>按提本金償還持續降低貸款餘額，10 年內已償還61.6%本金</a:t>
             </a:r>
           </a:p>
         </p:txBody>
@@ -7641,8 +7645,8 @@
         </p:nvSpPr>
         <p:spPr>
           <a:xfrm>
-            <a:off x="457200" y="5394960"/>
-            <a:ext cx="6858000" cy="822960"/>
+            <a:off x="457200" y="5257800"/>
+            <a:ext cx="6858000" cy="804672"/>
           </a:xfrm>
           <a:prstGeom prst="roundRect">
             <a:avLst/>
@@ -7686,8 +7690,8 @@
         </p:nvSpPr>
         <p:spPr>
           <a:xfrm>
-            <a:off x="640080" y="5440680"/>
-            <a:ext cx="1828800" cy="320040"/>
+            <a:off x="640080" y="5303520"/>
+            <a:ext cx="1828800" cy="274320"/>
           </a:xfrm>
           <a:prstGeom prst="rect">
             <a:avLst/>
@@ -7701,7 +7705,7 @@
           <a:lstStyle/>
           <a:p>
             <a:pPr algn="l">
-              <a:defRPr sz="1200" b="1">
+              <a:defRPr sz="1150" b="1">
                 <a:solidFill>
                   <a:srgbClr val="E74C3C"/>
                 </a:solidFill>
@@ -7722,7 +7726,7 @@
         </p:nvSpPr>
         <p:spPr>
           <a:xfrm>
-            <a:off x="640080" y="5715000"/>
+            <a:off x="640080" y="5550408"/>
             <a:ext cx="6400800" cy="502920"/>
           </a:xfrm>
           <a:prstGeom prst="rect">
@@ -7737,7 +7741,7 @@
           <a:lstStyle/>
           <a:p>
             <a:pPr algn="l">
-              <a:defRPr sz="950" b="0">
+              <a:defRPr sz="900" b="0">
                 <a:solidFill>
                   <a:srgbClr val="F5F2E8"/>
                 </a:solidFill>
@@ -7749,7 +7753,7 @@
             </a:r>
             <a:br/>
             <a:r>
-              <a:t>年化2.20%，15年總ROI +38.8%，仍大幅跑贏通脲</a:t>
+              <a:t>年化0.35%，10 年總ROI +3.6%，仍能保本并獲得正回報</a:t>
             </a:r>
           </a:p>
         </p:txBody>
@@ -7822,7 +7826,7 @@
           <a:lstStyle/>
           <a:p>
             <a:pPr algn="ctr">
-              <a:defRPr sz="1600" b="1">
+              <a:defRPr sz="1500" b="1">
                 <a:solidFill>
                   <a:srgbClr val="C9A84C"/>
                 </a:solidFill>
@@ -7830,7 +7834,7 @@
               </a:defRPr>
             </a:pPr>
             <a:r>
-              <a:t>風險評級總結</a:t>
+              <a:t>風險評級總結 (10 年)</a:t>
             </a:r>
           </a:p>
         </p:txBody>
@@ -8058,7 +8062,7 @@
             </a:r>
             <a:br/>
             <a:r>
-              <a:t>15年長期持有分散風險</a:t>
+              <a:t>10 年持有分散風險</a:t>
             </a:r>
           </a:p>
         </p:txBody>

--- a/download/PZC_FX_2Var_StressTest_JPY_Property.pptx
+++ b/download/PZC_FX_2Var_StressTest_JPY_Property.pptx
@@ -3708,7 +3708,7 @@
               </a:defRPr>
             </a:pPr>
             <a:r>
-              <a:t>最差情景: 0.35% 年化</a:t>
+              <a:t>最差情景: 1.29% 年化</a:t>
             </a:r>
           </a:p>
         </p:txBody>
@@ -4704,7 +4704,7 @@
                         </a:defRPr>
                       </a:pPr>
                       <a:r>
-                        <a:t>崩盤 -30%</a:t>
+                        <a:t>崩盤 -22%</a:t>
                       </a:r>
                     </a:p>
                   </a:txBody>
@@ -4722,13 +4722,37 @@
                       <a:pPr algn="ctr">
                         <a:defRPr sz="850" b="0">
                           <a:solidFill>
+                            <a:srgbClr val="82E0AA"/>
+                          </a:solidFill>
+                          <a:latin typeface="Sarasa Mono SC"/>
+                        </a:defRPr>
+                      </a:pPr>
+                      <a:r>
+                        <a:t>7.10%</a:t>
+                      </a:r>
+                    </a:p>
+                  </a:txBody>
+                  <a:tcPr>
+                    <a:solidFill>
+                      <a:srgbClr val="202228"/>
+                    </a:solidFill>
+                  </a:tcPr>
+                </a:tc>
+                <a:tc>
+                  <a:txBody>
+                    <a:bodyPr/>
+                    <a:lstStyle/>
+                    <a:p>
+                      <a:pPr algn="ctr">
+                        <a:defRPr sz="850" b="0">
+                          <a:solidFill>
                             <a:srgbClr val="C9A84C"/>
                           </a:solidFill>
                           <a:latin typeface="Sarasa Mono SC"/>
                         </a:defRPr>
                       </a:pPr>
                       <a:r>
-                        <a:t>6.11%</a:t>
+                        <a:t>6.41%</a:t>
                       </a:r>
                     </a:p>
                   </a:txBody>
@@ -4752,7 +4776,7 @@
                         </a:defRPr>
                       </a:pPr>
                       <a:r>
-                        <a:t>5.43%</a:t>
+                        <a:t>5.77%</a:t>
                       </a:r>
                     </a:p>
                   </a:txBody>
@@ -4770,13 +4794,37 @@
                       <a:pPr algn="ctr">
                         <a:defRPr sz="850" b="0">
                           <a:solidFill>
+                            <a:srgbClr val="C9A84C"/>
+                          </a:solidFill>
+                          <a:latin typeface="Sarasa Mono SC"/>
+                        </a:defRPr>
+                      </a:pPr>
+                      <a:r>
+                        <a:t>5.16%</a:t>
+                      </a:r>
+                    </a:p>
+                  </a:txBody>
+                  <a:tcPr>
+                    <a:solidFill>
+                      <a:srgbClr val="202228"/>
+                    </a:solidFill>
+                  </a:tcPr>
+                </a:tc>
+                <a:tc>
+                  <a:txBody>
+                    <a:bodyPr/>
+                    <a:lstStyle/>
+                    <a:p>
+                      <a:pPr algn="ctr">
+                        <a:defRPr sz="850" b="0">
+                          <a:solidFill>
                             <a:srgbClr val="F39C12"/>
                           </a:solidFill>
                           <a:latin typeface="Sarasa Mono SC"/>
                         </a:defRPr>
                       </a:pPr>
                       <a:r>
-                        <a:t>4.79%</a:t>
+                        <a:t>4.60%</a:t>
                       </a:r>
                     </a:p>
                   </a:txBody>
@@ -4800,7 +4848,7 @@
                         </a:defRPr>
                       </a:pPr>
                       <a:r>
-                        <a:t>4.19%</a:t>
+                        <a:t>4.06%</a:t>
                       </a:r>
                     </a:p>
                   </a:txBody>
@@ -4824,7 +4872,7 @@
                         </a:defRPr>
                       </a:pPr>
                       <a:r>
-                        <a:t>3.63%</a:t>
+                        <a:t>3.56%</a:t>
                       </a:r>
                     </a:p>
                   </a:txBody>
@@ -4848,7 +4896,7 @@
                         </a:defRPr>
                       </a:pPr>
                       <a:r>
-                        <a:t>3.10%</a:t>
+                        <a:t>3.08%</a:t>
                       </a:r>
                     </a:p>
                   </a:txBody>
@@ -4872,7 +4920,7 @@
                         </a:defRPr>
                       </a:pPr>
                       <a:r>
-                        <a:t>2.60%</a:t>
+                        <a:t>2.62%</a:t>
                       </a:r>
                     </a:p>
                   </a:txBody>
@@ -4896,7 +4944,7 @@
                         </a:defRPr>
                       </a:pPr>
                       <a:r>
-                        <a:t>2.12%</a:t>
+                        <a:t>2.18%</a:t>
                       </a:r>
                     </a:p>
                   </a:txBody>
@@ -4920,7 +4968,7 @@
                         </a:defRPr>
                       </a:pPr>
                       <a:r>
-                        <a:t>1.67%</a:t>
+                        <a:t>1.37%</a:t>
                       </a:r>
                     </a:p>
                   </a:txBody>
@@ -4944,55 +4992,7 @@
                         </a:defRPr>
                       </a:pPr>
                       <a:r>
-                        <a:t>1.24%</a:t>
-                      </a:r>
-                    </a:p>
-                  </a:txBody>
-                  <a:tcPr>
-                    <a:solidFill>
-                      <a:srgbClr val="202228"/>
-                    </a:solidFill>
-                  </a:tcPr>
-                </a:tc>
-                <a:tc>
-                  <a:txBody>
-                    <a:bodyPr/>
-                    <a:lstStyle/>
-                    <a:p>
-                      <a:pPr algn="ctr">
-                        <a:defRPr sz="850" b="0">
-                          <a:solidFill>
-                            <a:srgbClr val="E74C3C"/>
-                          </a:solidFill>
-                          <a:latin typeface="Sarasa Mono SC"/>
-                        </a:defRPr>
-                      </a:pPr>
-                      <a:r>
-                        <a:t>0.43%</a:t>
-                      </a:r>
-                    </a:p>
-                  </a:txBody>
-                  <a:tcPr>
-                    <a:solidFill>
-                      <a:srgbClr val="202228"/>
-                    </a:solidFill>
-                  </a:tcPr>
-                </a:tc>
-                <a:tc>
-                  <a:txBody>
-                    <a:bodyPr/>
-                    <a:lstStyle/>
-                    <a:p>
-                      <a:pPr algn="ctr">
-                        <a:defRPr sz="850" b="0">
-                          <a:solidFill>
-                            <a:srgbClr val="E74C3C"/>
-                          </a:solidFill>
-                          <a:latin typeface="Sarasa Mono SC"/>
-                        </a:defRPr>
-                      </a:pPr>
-                      <a:r>
-                        <a:t>0.35%</a:t>
+                        <a:t>1.29%</a:t>
                       </a:r>
                     </a:p>
                   </a:txBody>
@@ -5018,7 +5018,7 @@
                         </a:defRPr>
                       </a:pPr>
                       <a:r>
-                        <a:t>下跌 -15%</a:t>
+                        <a:t>下跌 -10%</a:t>
                       </a:r>
                     </a:p>
                   </a:txBody>
@@ -5042,7 +5042,7 @@
                         </a:defRPr>
                       </a:pPr>
                       <a:r>
-                        <a:t>7.92%</a:t>
+                        <a:t>8.44%</a:t>
                       </a:r>
                     </a:p>
                   </a:txBody>
@@ -5066,7 +5066,7 @@
                         </a:defRPr>
                       </a:pPr>
                       <a:r>
-                        <a:t>7.22%</a:t>
+                        <a:t>7.74%</a:t>
                       </a:r>
                     </a:p>
                   </a:txBody>
@@ -5084,13 +5084,37 @@
                       <a:pPr algn="ctr">
                         <a:defRPr sz="850" b="0">
                           <a:solidFill>
+                            <a:srgbClr val="82E0AA"/>
+                          </a:solidFill>
+                          <a:latin typeface="Sarasa Mono SC"/>
+                        </a:defRPr>
+                      </a:pPr>
+                      <a:r>
+                        <a:t>7.09%</a:t>
+                      </a:r>
+                    </a:p>
+                  </a:txBody>
+                  <a:tcPr>
+                    <a:solidFill>
+                      <a:srgbClr val="202228"/>
+                    </a:solidFill>
+                  </a:tcPr>
+                </a:tc>
+                <a:tc>
+                  <a:txBody>
+                    <a:bodyPr/>
+                    <a:lstStyle/>
+                    <a:p>
+                      <a:pPr algn="ctr">
+                        <a:defRPr sz="850" b="0">
+                          <a:solidFill>
                             <a:srgbClr val="C9A84C"/>
                           </a:solidFill>
                           <a:latin typeface="Sarasa Mono SC"/>
                         </a:defRPr>
                       </a:pPr>
                       <a:r>
-                        <a:t>6.58%</a:t>
+                        <a:t>6.48%</a:t>
                       </a:r>
                     </a:p>
                   </a:txBody>
@@ -5114,7 +5138,7 @@
                         </a:defRPr>
                       </a:pPr>
                       <a:r>
-                        <a:t>5.97%</a:t>
+                        <a:t>5.91%</a:t>
                       </a:r>
                     </a:p>
                   </a:txBody>
@@ -5138,7 +5162,7 @@
                         </a:defRPr>
                       </a:pPr>
                       <a:r>
-                        <a:t>5.40%</a:t>
+                        <a:t>5.37%</a:t>
                       </a:r>
                     </a:p>
                   </a:txBody>
@@ -5162,7 +5186,7 @@
                         </a:defRPr>
                       </a:pPr>
                       <a:r>
-                        <a:t>4.86%</a:t>
+                        <a:t>4.85%</a:t>
                       </a:r>
                     </a:p>
                   </a:txBody>
@@ -5186,7 +5210,7 @@
                         </a:defRPr>
                       </a:pPr>
                       <a:r>
-                        <a:t>4.35%</a:t>
+                        <a:t>4.37%</a:t>
                       </a:r>
                     </a:p>
                   </a:txBody>
@@ -5210,7 +5234,7 @@
                         </a:defRPr>
                       </a:pPr>
                       <a:r>
-                        <a:t>3.86%</a:t>
+                        <a:t>3.90%</a:t>
                       </a:r>
                     </a:p>
                   </a:txBody>
@@ -5234,7 +5258,7 @@
                         </a:defRPr>
                       </a:pPr>
                       <a:r>
-                        <a:t>3.40%</a:t>
+                        <a:t>3.46%</a:t>
                       </a:r>
                     </a:p>
                   </a:txBody>
@@ -5258,7 +5282,7 @@
                         </a:defRPr>
                       </a:pPr>
                       <a:r>
-                        <a:t>2.96%</a:t>
+                        <a:t>2.64%</a:t>
                       </a:r>
                     </a:p>
                   </a:txBody>
@@ -5282,31 +5306,7 @@
                         </a:defRPr>
                       </a:pPr>
                       <a:r>
-                        <a:t>2.14%</a:t>
-                      </a:r>
-                    </a:p>
-                  </a:txBody>
-                  <a:tcPr>
-                    <a:solidFill>
-                      <a:srgbClr val="202228"/>
-                    </a:solidFill>
-                  </a:tcPr>
-                </a:tc>
-                <a:tc>
-                  <a:txBody>
-                    <a:bodyPr/>
-                    <a:lstStyle/>
-                    <a:p>
-                      <a:pPr algn="ctr">
-                        <a:defRPr sz="850" b="0">
-                          <a:solidFill>
-                            <a:srgbClr val="E74C3C"/>
-                          </a:solidFill>
-                          <a:latin typeface="Sarasa Mono SC"/>
-                        </a:defRPr>
-                      </a:pPr>
-                      <a:r>
-                        <a:t>2.06%</a:t>
+                        <a:t>2.56%</a:t>
                       </a:r>
                     </a:p>
                   </a:txBody>
@@ -5646,7 +5646,7 @@
                         </a:defRPr>
                       </a:pPr>
                       <a:r>
-                        <a:t>增長 +15%</a:t>
+                        <a:t>增長 +10%</a:t>
                       </a:r>
                     </a:p>
                   </a:txBody>
@@ -5670,7 +5670,7 @@
                         </a:defRPr>
                       </a:pPr>
                       <a:r>
-                        <a:t>10.89%</a:t>
+                        <a:t>10.42%</a:t>
                       </a:r>
                     </a:p>
                   </a:txBody>
@@ -5688,13 +5688,13 @@
                       <a:pPr algn="ctr">
                         <a:defRPr sz="850" b="0">
                           <a:solidFill>
-                            <a:srgbClr val="2ECC71"/>
-                          </a:solidFill>
-                          <a:latin typeface="Sarasa Mono SC"/>
-                        </a:defRPr>
-                      </a:pPr>
-                      <a:r>
-                        <a:t>10.18%</a:t>
+                            <a:srgbClr val="82E0AA"/>
+                          </a:solidFill>
+                          <a:latin typeface="Sarasa Mono SC"/>
+                        </a:defRPr>
+                      </a:pPr>
+                      <a:r>
+                        <a:t>9.71%</a:t>
                       </a:r>
                     </a:p>
                   </a:txBody>
@@ -5718,7 +5718,7 @@
                         </a:defRPr>
                       </a:pPr>
                       <a:r>
-                        <a:t>9.51%</a:t>
+                        <a:t>9.05%</a:t>
                       </a:r>
                     </a:p>
                   </a:txBody>
@@ -5742,7 +5742,7 @@
                         </a:defRPr>
                       </a:pPr>
                       <a:r>
-                        <a:t>8.89%</a:t>
+                        <a:t>8.43%</a:t>
                       </a:r>
                     </a:p>
                   </a:txBody>
@@ -5766,7 +5766,7 @@
                         </a:defRPr>
                       </a:pPr>
                       <a:r>
-                        <a:t>8.30%</a:t>
+                        <a:t>7.84%</a:t>
                       </a:r>
                     </a:p>
                   </a:txBody>
@@ -5790,7 +5790,7 @@
                         </a:defRPr>
                       </a:pPr>
                       <a:r>
-                        <a:t>7.74%</a:t>
+                        <a:t>7.29%</a:t>
                       </a:r>
                     </a:p>
                   </a:txBody>
@@ -5808,13 +5808,13 @@
                       <a:pPr algn="ctr">
                         <a:defRPr sz="850" b="0">
                           <a:solidFill>
-                            <a:srgbClr val="82E0AA"/>
-                          </a:solidFill>
-                          <a:latin typeface="Sarasa Mono SC"/>
-                        </a:defRPr>
-                      </a:pPr>
-                      <a:r>
-                        <a:t>7.22%</a:t>
+                            <a:srgbClr val="C9A84C"/>
+                          </a:solidFill>
+                          <a:latin typeface="Sarasa Mono SC"/>
+                        </a:defRPr>
+                      </a:pPr>
+                      <a:r>
+                        <a:t>6.77%</a:t>
                       </a:r>
                     </a:p>
                   </a:txBody>
@@ -5838,7 +5838,7 @@
                         </a:defRPr>
                       </a:pPr>
                       <a:r>
-                        <a:t>6.72%</a:t>
+                        <a:t>6.27%</a:t>
                       </a:r>
                     </a:p>
                   </a:txBody>
@@ -5862,7 +5862,7 @@
                         </a:defRPr>
                       </a:pPr>
                       <a:r>
-                        <a:t>6.25%</a:t>
+                        <a:t>5.80%</a:t>
                       </a:r>
                     </a:p>
                   </a:txBody>
@@ -5886,7 +5886,7 @@
                         </a:defRPr>
                       </a:pPr>
                       <a:r>
-                        <a:t>5.80%</a:t>
+                        <a:t>5.35%</a:t>
                       </a:r>
                     </a:p>
                   </a:txBody>
@@ -5910,7 +5910,7 @@
                         </a:defRPr>
                       </a:pPr>
                       <a:r>
-                        <a:t>4.95%</a:t>
+                        <a:t>4.51%</a:t>
                       </a:r>
                     </a:p>
                   </a:txBody>
@@ -5934,7 +5934,7 @@
                         </a:defRPr>
                       </a:pPr>
                       <a:r>
-                        <a:t>4.87%</a:t>
+                        <a:t>4.43%</a:t>
                       </a:r>
                     </a:p>
                   </a:txBody>
@@ -5960,7 +5960,7 @@
                         </a:defRPr>
                       </a:pPr>
                       <a:r>
-                        <a:t>增長 +30%</a:t>
+                        <a:t>增長 +19%</a:t>
                       </a:r>
                     </a:p>
                   </a:txBody>
@@ -5984,7 +5984,7 @@
                         </a:defRPr>
                       </a:pPr>
                       <a:r>
-                        <a:t>12.14%</a:t>
+                        <a:t>11.25%</a:t>
                       </a:r>
                     </a:p>
                   </a:txBody>
@@ -6008,7 +6008,7 @@
                         </a:defRPr>
                       </a:pPr>
                       <a:r>
-                        <a:t>11.42%</a:t>
+                        <a:t>10.53%</a:t>
                       </a:r>
                     </a:p>
                   </a:txBody>
@@ -6026,13 +6026,13 @@
                       <a:pPr algn="ctr">
                         <a:defRPr sz="850" b="0">
                           <a:solidFill>
-                            <a:srgbClr val="2ECC71"/>
-                          </a:solidFill>
-                          <a:latin typeface="Sarasa Mono SC"/>
-                        </a:defRPr>
-                      </a:pPr>
-                      <a:r>
-                        <a:t>10.74%</a:t>
+                            <a:srgbClr val="82E0AA"/>
+                          </a:solidFill>
+                          <a:latin typeface="Sarasa Mono SC"/>
+                        </a:defRPr>
+                      </a:pPr>
+                      <a:r>
+                        <a:t>9.86%</a:t>
                       </a:r>
                     </a:p>
                   </a:txBody>
@@ -6050,13 +6050,13 @@
                       <a:pPr algn="ctr">
                         <a:defRPr sz="850" b="0">
                           <a:solidFill>
-                            <a:srgbClr val="2ECC71"/>
-                          </a:solidFill>
-                          <a:latin typeface="Sarasa Mono SC"/>
-                        </a:defRPr>
-                      </a:pPr>
-                      <a:r>
-                        <a:t>10.11%</a:t>
+                            <a:srgbClr val="82E0AA"/>
+                          </a:solidFill>
+                          <a:latin typeface="Sarasa Mono SC"/>
+                        </a:defRPr>
+                      </a:pPr>
+                      <a:r>
+                        <a:t>9.24%</a:t>
                       </a:r>
                     </a:p>
                   </a:txBody>
@@ -6080,7 +6080,7 @@
                         </a:defRPr>
                       </a:pPr>
                       <a:r>
-                        <a:t>9.52%</a:t>
+                        <a:t>8.65%</a:t>
                       </a:r>
                     </a:p>
                   </a:txBody>
@@ -6104,7 +6104,7 @@
                         </a:defRPr>
                       </a:pPr>
                       <a:r>
-                        <a:t>8.96%</a:t>
+                        <a:t>8.09%</a:t>
                       </a:r>
                     </a:p>
                   </a:txBody>
@@ -6128,7 +6128,7 @@
                         </a:defRPr>
                       </a:pPr>
                       <a:r>
-                        <a:t>8.43%</a:t>
+                        <a:t>7.57%</a:t>
                       </a:r>
                     </a:p>
                   </a:txBody>
@@ -6152,7 +6152,7 @@
                         </a:defRPr>
                       </a:pPr>
                       <a:r>
-                        <a:t>7.92%</a:t>
+                        <a:t>7.07%</a:t>
                       </a:r>
                     </a:p>
                   </a:txBody>
@@ -6170,13 +6170,13 @@
                       <a:pPr algn="ctr">
                         <a:defRPr sz="850" b="0">
                           <a:solidFill>
-                            <a:srgbClr val="82E0AA"/>
-                          </a:solidFill>
-                          <a:latin typeface="Sarasa Mono SC"/>
-                        </a:defRPr>
-                      </a:pPr>
-                      <a:r>
-                        <a:t>7.45%</a:t>
+                            <a:srgbClr val="C9A84C"/>
+                          </a:solidFill>
+                          <a:latin typeface="Sarasa Mono SC"/>
+                        </a:defRPr>
+                      </a:pPr>
+                      <a:r>
+                        <a:t>6.59%</a:t>
                       </a:r>
                     </a:p>
                   </a:txBody>
@@ -6200,7 +6200,7 @@
                         </a:defRPr>
                       </a:pPr>
                       <a:r>
-                        <a:t>6.99%</a:t>
+                        <a:t>6.14%</a:t>
                       </a:r>
                     </a:p>
                   </a:txBody>
@@ -6224,7 +6224,7 @@
                         </a:defRPr>
                       </a:pPr>
                       <a:r>
-                        <a:t>6.14%</a:t>
+                        <a:t>5.29%</a:t>
                       </a:r>
                     </a:p>
                   </a:txBody>
@@ -6248,7 +6248,7 @@
                         </a:defRPr>
                       </a:pPr>
                       <a:r>
-                        <a:t>6.06%</a:t>
+                        <a:t>5.21%</a:t>
                       </a:r>
                     </a:p>
                   </a:txBody>
@@ -6274,7 +6274,7 @@
                         </a:defRPr>
                       </a:pPr>
                       <a:r>
-                        <a:t>增長 +50%</a:t>
+                        <a:t>增長 +31%</a:t>
                       </a:r>
                     </a:p>
                   </a:txBody>
@@ -6298,7 +6298,7 @@
                         </a:defRPr>
                       </a:pPr>
                       <a:r>
-                        <a:t>13.63%</a:t>
+                        <a:t>12.22%</a:t>
                       </a:r>
                     </a:p>
                   </a:txBody>
@@ -6322,7 +6322,7 @@
                         </a:defRPr>
                       </a:pPr>
                       <a:r>
-                        <a:t>12.90%</a:t>
+                        <a:t>11.50%</a:t>
                       </a:r>
                     </a:p>
                   </a:txBody>
@@ -6346,7 +6346,7 @@
                         </a:defRPr>
                       </a:pPr>
                       <a:r>
-                        <a:t>12.22%</a:t>
+                        <a:t>10.82%</a:t>
                       </a:r>
                     </a:p>
                   </a:txBody>
@@ -6370,7 +6370,7 @@
                         </a:defRPr>
                       </a:pPr>
                       <a:r>
-                        <a:t>11.58%</a:t>
+                        <a:t>10.19%</a:t>
                       </a:r>
                     </a:p>
                   </a:txBody>
@@ -6388,13 +6388,13 @@
                       <a:pPr algn="ctr">
                         <a:defRPr sz="850" b="0">
                           <a:solidFill>
-                            <a:srgbClr val="2ECC71"/>
-                          </a:solidFill>
-                          <a:latin typeface="Sarasa Mono SC"/>
-                        </a:defRPr>
-                      </a:pPr>
-                      <a:r>
-                        <a:t>10.98%</a:t>
+                            <a:srgbClr val="82E0AA"/>
+                          </a:solidFill>
+                          <a:latin typeface="Sarasa Mono SC"/>
+                        </a:defRPr>
+                      </a:pPr>
+                      <a:r>
+                        <a:t>9.60%</a:t>
                       </a:r>
                     </a:p>
                   </a:txBody>
@@ -6412,13 +6412,13 @@
                       <a:pPr algn="ctr">
                         <a:defRPr sz="850" b="0">
                           <a:solidFill>
-                            <a:srgbClr val="2ECC71"/>
-                          </a:solidFill>
-                          <a:latin typeface="Sarasa Mono SC"/>
-                        </a:defRPr>
-                      </a:pPr>
-                      <a:r>
-                        <a:t>10.41%</a:t>
+                            <a:srgbClr val="82E0AA"/>
+                          </a:solidFill>
+                          <a:latin typeface="Sarasa Mono SC"/>
+                        </a:defRPr>
+                      </a:pPr>
+                      <a:r>
+                        <a:t>9.04%</a:t>
                       </a:r>
                     </a:p>
                   </a:txBody>
@@ -6442,7 +6442,7 @@
                         </a:defRPr>
                       </a:pPr>
                       <a:r>
-                        <a:t>9.87%</a:t>
+                        <a:t>8.51%</a:t>
                       </a:r>
                     </a:p>
                   </a:txBody>
@@ -6466,7 +6466,7 @@
                         </a:defRPr>
                       </a:pPr>
                       <a:r>
-                        <a:t>9.36%</a:t>
+                        <a:t>8.00%</a:t>
                       </a:r>
                     </a:p>
                   </a:txBody>
@@ -6490,7 +6490,7 @@
                         </a:defRPr>
                       </a:pPr>
                       <a:r>
-                        <a:t>8.88%</a:t>
+                        <a:t>7.52%</a:t>
                       </a:r>
                     </a:p>
                   </a:txBody>
@@ -6514,7 +6514,7 @@
                         </a:defRPr>
                       </a:pPr>
                       <a:r>
-                        <a:t>8.41%</a:t>
+                        <a:t>7.07%</a:t>
                       </a:r>
                     </a:p>
                   </a:txBody>
@@ -6532,13 +6532,13 @@
                       <a:pPr algn="ctr">
                         <a:defRPr sz="850" b="0">
                           <a:solidFill>
-                            <a:srgbClr val="82E0AA"/>
-                          </a:solidFill>
-                          <a:latin typeface="Sarasa Mono SC"/>
-                        </a:defRPr>
-                      </a:pPr>
-                      <a:r>
-                        <a:t>7.55%</a:t>
+                            <a:srgbClr val="C9A84C"/>
+                          </a:solidFill>
+                          <a:latin typeface="Sarasa Mono SC"/>
+                        </a:defRPr>
+                      </a:pPr>
+                      <a:r>
+                        <a:t>6.21%</a:t>
                       </a:r>
                     </a:p>
                   </a:txBody>
@@ -6556,13 +6556,13 @@
                       <a:pPr algn="ctr">
                         <a:defRPr sz="850" b="0">
                           <a:solidFill>
-                            <a:srgbClr val="82E0AA"/>
-                          </a:solidFill>
-                          <a:latin typeface="Sarasa Mono SC"/>
-                        </a:defRPr>
-                      </a:pPr>
-                      <a:r>
-                        <a:t>7.47%</a:t>
+                            <a:srgbClr val="C9A84C"/>
+                          </a:solidFill>
+                          <a:latin typeface="Sarasa Mono SC"/>
+                        </a:defRPr>
+                      </a:pPr>
+                      <a:r>
+                        <a:t>6.13%</a:t>
                       </a:r>
                     </a:p>
                   </a:txBody>
@@ -6588,7 +6588,7 @@
                         </a:defRPr>
                       </a:pPr>
                       <a:r>
-                        <a:t>增長 +80%</a:t>
+                        <a:t>增長 +48%</a:t>
                       </a:r>
                     </a:p>
                   </a:txBody>
@@ -6612,7 +6612,7 @@
                         </a:defRPr>
                       </a:pPr>
                       <a:r>
-                        <a:t>15.59%</a:t>
+                        <a:t>13.47%</a:t>
                       </a:r>
                     </a:p>
                   </a:txBody>
@@ -6636,7 +6636,7 @@
                         </a:defRPr>
                       </a:pPr>
                       <a:r>
-                        <a:t>14.84%</a:t>
+                        <a:t>12.74%</a:t>
                       </a:r>
                     </a:p>
                   </a:txBody>
@@ -6660,7 +6660,7 @@
                         </a:defRPr>
                       </a:pPr>
                       <a:r>
-                        <a:t>14.15%</a:t>
+                        <a:t>12.06%</a:t>
                       </a:r>
                     </a:p>
                   </a:txBody>
@@ -6684,7 +6684,7 @@
                         </a:defRPr>
                       </a:pPr>
                       <a:r>
-                        <a:t>13.50%</a:t>
+                        <a:t>11.42%</a:t>
                       </a:r>
                     </a:p>
                   </a:txBody>
@@ -6708,7 +6708,7 @@
                         </a:defRPr>
                       </a:pPr>
                       <a:r>
-                        <a:t>12.89%</a:t>
+                        <a:t>10.82%</a:t>
                       </a:r>
                     </a:p>
                   </a:txBody>
@@ -6732,7 +6732,7 @@
                         </a:defRPr>
                       </a:pPr>
                       <a:r>
-                        <a:t>12.31%</a:t>
+                        <a:t>10.25%</a:t>
                       </a:r>
                     </a:p>
                   </a:txBody>
@@ -6750,13 +6750,13 @@
                       <a:pPr algn="ctr">
                         <a:defRPr sz="850" b="0">
                           <a:solidFill>
-                            <a:srgbClr val="2ECC71"/>
-                          </a:solidFill>
-                          <a:latin typeface="Sarasa Mono SC"/>
-                        </a:defRPr>
-                      </a:pPr>
-                      <a:r>
-                        <a:t>11.76%</a:t>
+                            <a:srgbClr val="82E0AA"/>
+                          </a:solidFill>
+                          <a:latin typeface="Sarasa Mono SC"/>
+                        </a:defRPr>
+                      </a:pPr>
+                      <a:r>
+                        <a:t>9.71%</a:t>
                       </a:r>
                     </a:p>
                   </a:txBody>
@@ -6774,13 +6774,13 @@
                       <a:pPr algn="ctr">
                         <a:defRPr sz="850" b="0">
                           <a:solidFill>
-                            <a:srgbClr val="2ECC71"/>
-                          </a:solidFill>
-                          <a:latin typeface="Sarasa Mono SC"/>
-                        </a:defRPr>
-                      </a:pPr>
-                      <a:r>
-                        <a:t>11.25%</a:t>
+                            <a:srgbClr val="82E0AA"/>
+                          </a:solidFill>
+                          <a:latin typeface="Sarasa Mono SC"/>
+                        </a:defRPr>
+                      </a:pPr>
+                      <a:r>
+                        <a:t>9.21%</a:t>
                       </a:r>
                     </a:p>
                   </a:txBody>
@@ -6798,13 +6798,13 @@
                       <a:pPr algn="ctr">
                         <a:defRPr sz="850" b="0">
                           <a:solidFill>
-                            <a:srgbClr val="2ECC71"/>
-                          </a:solidFill>
-                          <a:latin typeface="Sarasa Mono SC"/>
-                        </a:defRPr>
-                      </a:pPr>
-                      <a:r>
-                        <a:t>10.75%</a:t>
+                            <a:srgbClr val="82E0AA"/>
+                          </a:solidFill>
+                          <a:latin typeface="Sarasa Mono SC"/>
+                        </a:defRPr>
+                      </a:pPr>
+                      <a:r>
+                        <a:t>8.72%</a:t>
                       </a:r>
                     </a:p>
                   </a:txBody>
@@ -6822,13 +6822,13 @@
                       <a:pPr algn="ctr">
                         <a:defRPr sz="850" b="0">
                           <a:solidFill>
-                            <a:srgbClr val="2ECC71"/>
-                          </a:solidFill>
-                          <a:latin typeface="Sarasa Mono SC"/>
-                        </a:defRPr>
-                      </a:pPr>
-                      <a:r>
-                        <a:t>10.28%</a:t>
+                            <a:srgbClr val="82E0AA"/>
+                          </a:solidFill>
+                          <a:latin typeface="Sarasa Mono SC"/>
+                        </a:defRPr>
+                      </a:pPr>
+                      <a:r>
+                        <a:t>8.26%</a:t>
                       </a:r>
                     </a:p>
                   </a:txBody>
@@ -6852,7 +6852,7 @@
                         </a:defRPr>
                       </a:pPr>
                       <a:r>
-                        <a:t>9.40%</a:t>
+                        <a:t>7.40%</a:t>
                       </a:r>
                     </a:p>
                   </a:txBody>
@@ -6876,7 +6876,7 @@
                         </a:defRPr>
                       </a:pPr>
                       <a:r>
-                        <a:t>9.32%</a:t>
+                        <a:t>7.31%</a:t>
                       </a:r>
                     </a:p>
                   </a:txBody>
@@ -7265,7 +7265,7 @@
               </a:defRPr>
             </a:pPr>
             <a:r>
-              <a:t>全部84個情景均錄得正回報，最差年化仍達0.35%</a:t>
+              <a:t>全部84個情景均錄得正回報，最差年化仍達1.29%</a:t>
             </a:r>
             <a:br/>
             <a:r>
@@ -7753,7 +7753,7 @@
             </a:r>
             <a:br/>
             <a:r>
-              <a:t>年化0.35%，10 年總ROI +3.6%，仍能保本并獲得正回報</a:t>
+              <a:t>年化1.29%，10 年總ROI +3.6%，仍能保本并獲得正回報</a:t>
             </a:r>
           </a:p>
         </p:txBody>
